--- a/docs/pptx/auc3/ritu-auc3-linsubhr-dosedisc-death.pptx
+++ b/docs/pptx/auc3/ritu-auc3-linsubhr-dosedisc-death.pptx
@@ -2443,7 +2443,7 @@
           </p:nvSpPr>
           <p:spPr>
             <a:xfrm>
-              <a:off x="980186" y="1896563"/>
+              <a:off x="980739" y="1896563"/>
               <a:ext cx="0" cy="3826579"/>
             </a:xfrm>
             <a:custGeom>
@@ -2486,7 +2486,7 @@
           </p:nvSpPr>
           <p:spPr>
             <a:xfrm>
-              <a:off x="3262630" y="1896563"/>
+              <a:off x="3260798" y="1896563"/>
               <a:ext cx="0" cy="3826579"/>
             </a:xfrm>
             <a:custGeom>
@@ -2529,7 +2529,7 @@
           </p:nvSpPr>
           <p:spPr>
             <a:xfrm>
-              <a:off x="5545073" y="1896563"/>
+              <a:off x="5540858" y="1896563"/>
               <a:ext cx="0" cy="3826579"/>
             </a:xfrm>
             <a:custGeom>
@@ -2572,7 +2572,7 @@
           </p:nvSpPr>
           <p:spPr>
             <a:xfrm>
-              <a:off x="7827517" y="1896563"/>
+              <a:off x="7820918" y="1896563"/>
               <a:ext cx="0" cy="3826579"/>
             </a:xfrm>
             <a:custGeom>
@@ -2830,7 +2830,7 @@
           </p:nvSpPr>
           <p:spPr>
             <a:xfrm>
-              <a:off x="2121408" y="1896563"/>
+              <a:off x="2120768" y="1896563"/>
               <a:ext cx="0" cy="3826579"/>
             </a:xfrm>
             <a:custGeom>
@@ -2873,7 +2873,7 @@
           </p:nvSpPr>
           <p:spPr>
             <a:xfrm>
-              <a:off x="4403852" y="1896563"/>
+              <a:off x="4400828" y="1896563"/>
               <a:ext cx="0" cy="3826579"/>
             </a:xfrm>
             <a:custGeom>
@@ -2916,7 +2916,7 @@
           </p:nvSpPr>
           <p:spPr>
             <a:xfrm>
-              <a:off x="6686295" y="1896563"/>
+              <a:off x="6680888" y="1896563"/>
               <a:ext cx="0" cy="3826579"/>
             </a:xfrm>
             <a:custGeom>
@@ -3002,7 +3002,7 @@
           </p:nvSpPr>
           <p:spPr>
             <a:xfrm>
-              <a:off x="4374536" y="1896563"/>
+              <a:off x="4334057" y="1896563"/>
               <a:ext cx="0" cy="3826579"/>
             </a:xfrm>
             <a:custGeom>
@@ -3275,7 +3275,7 @@
           </p:nvSpPr>
           <p:spPr>
             <a:xfrm>
-              <a:off x="2009531" y="5785772"/>
+              <a:off x="2008892" y="5785772"/>
               <a:ext cx="223753" cy="80101"/>
             </a:xfrm>
             <a:prstGeom prst="rect">
@@ -3321,7 +3321,7 @@
           </p:nvSpPr>
           <p:spPr>
             <a:xfrm>
-              <a:off x="4372762" y="5785772"/>
+              <a:off x="4369739" y="5785772"/>
               <a:ext cx="62179" cy="80101"/>
             </a:xfrm>
             <a:prstGeom prst="rect">
@@ -3367,7 +3367,7 @@
           </p:nvSpPr>
           <p:spPr>
             <a:xfrm>
-              <a:off x="6593026" y="5785772"/>
+              <a:off x="6587619" y="5785772"/>
               <a:ext cx="186537" cy="80101"/>
             </a:xfrm>
             <a:prstGeom prst="rect">
